--- a/Progression_P6/P6-L01_Bridge_Launch.pptx
+++ b/Progression_P6/P6-L01_Bridge_Launch.pptx
@@ -526,7 +526,11 @@
           <a:lstStyle/>
           <a:p>
             <a:r>
-              <a:rPr lang="en-US" dirty="0"/>
+              <a:rPr lang="ar-SA" dirty="0">
+                <a:latin typeface="Amiri" pitchFamily="2" charset="-78"/>
+                <a:ea typeface="Amiri" pitchFamily="2" charset="-78"/>
+                <a:cs typeface="Amiri" pitchFamily="2" charset="-78"/>
+              </a:rPr>
               <a:t>LESSON AT A GLANCE — planned for 56 minutes, leaving about 4 minutes for Teams delays.
 0–1 Welcome · 1–2 Map · 2–8 Do Now + answers · 8–9 Objectives · 9–15 Exam words · 15–21 The four papers + quick check · 21–31 Readiness audit · 31–36 The Bridge map · 36–41 SMART targets (I Do) · 41–52 Speak + write your targets · 52–57 Journey reflection + self-check · 57–60 Preparation.
 FLEX slides are optional. Use them if the class is moving quickly; otherwise the same activities are on the website for homework.
@@ -627,7 +631,11 @@
           <a:lstStyle/>
           <a:p>
             <a:r>
-              <a:rPr lang="en-US" dirty="0"/>
+              <a:rPr lang="ar-SA" dirty="0">
+                <a:latin typeface="Amiri" pitchFamily="2" charset="-78"/>
+                <a:ea typeface="Amiri" pitchFamily="2" charset="-78"/>
+                <a:cs typeface="Amiri" pitchFamily="2" charset="-78"/>
+              </a:rPr>
               <a:t>KEY WORDS — Readiness and targets (website vocabulary (1 of 2)). Hear → Say → See → Use. Transliteration is printed for Core students (cover it for Develop/Stretch).
 Readiness and targets: نُقْطَةُ قُوَّةٍ (a strength) ↔ مَجَالُ تَحْسِينٍ (an area for improvement). هَدَفٌ مُحَدَّدٌ = a SPECIFIC target (the website prints مَحَدَّدٌ; the participle of Form II حَدَّدَ is مُحَدَّدٌ). Say your target with an + -a: هَدَفِي أَنْ أُتْقِنَ …</a:t>
             </a:r>
@@ -716,7 +724,11 @@
           <a:lstStyle/>
           <a:p>
             <a:r>
-              <a:rPr lang="en-US" dirty="0"/>
+              <a:rPr lang="ar-SA" dirty="0">
+                <a:latin typeface="Amiri" pitchFamily="2" charset="-78"/>
+                <a:ea typeface="Amiri" pitchFamily="2" charset="-78"/>
+                <a:cs typeface="Amiri" pitchFamily="2" charset="-78"/>
+              </a:rPr>
               <a:t>KEY WORDS — Readiness and targets (website vocabulary (2 of 2)). Hear → Say → See → Use. Transliteration is printed for Core students (cover it for Develop/Stretch).
 Readiness and targets: نُقْطَةُ قُوَّةٍ (a strength) ↔ مَجَالُ تَحْسِينٍ (an area for improvement). هَدَفٌ مُحَدَّدٌ = a SPECIFIC target (the website prints مَحَدَّدٌ; the participle of Form II حَدَّدَ is مُحَدَّدٌ). Say your target with an + -a: هَدَفِي أَنْ أُتْقِنَ …</a:t>
             </a:r>
@@ -1518,7 +1530,11 @@
           <a:lstStyle/>
           <a:p>
             <a:r>
-              <a:rPr lang="en-US" dirty="0"/>
+              <a:rPr lang="ar-SA" dirty="0">
+                <a:latin typeface="Amiri" pitchFamily="2" charset="-78"/>
+                <a:ea typeface="Amiri" pitchFamily="2" charset="-78"/>
+                <a:cs typeface="Amiri" pitchFamily="2" charset="-78"/>
+              </a:rPr>
               <a:t>WELCOME (1 min) — while students join.
 • Greet each student by name as they arrive: السَّلَامُ عَلَيْكُمْ. Take the register (Pastoral Tracker: attendance 0/1).
 • 2-MINUTE CHECK-IN (SEND training): a private chat to any student who seemed unsettled last lesson — “Are you okay today? 👍 / 👎”.
@@ -1611,7 +1627,11 @@
           <a:lstStyle/>
           <a:p>
             <a:r>
-              <a:rPr lang="en-US" dirty="0"/>
+              <a:rPr lang="ar-SA" dirty="0">
+                <a:latin typeface="Amiri" pitchFamily="2" charset="-78"/>
+                <a:ea typeface="Amiri" pitchFamily="2" charset="-78"/>
+                <a:cs typeface="Amiri" pitchFamily="2" charset="-78"/>
+              </a:rPr>
               <a:t>I DO (5 min) — think aloud with the website example. Turn a vague wish into a SMART target on screen: “I want to be better at listening” → S (Paper 1) → M (35+/45) → A (annotate + verify) → T (by the L08 mock). Then say it in Arabic with an + -a: هَدَفِي أَنْ أُحَسِّنَ … · يَتَطَلَّبُ ذٰلِكَ أَنْ أَقْرَأَ … — P5 grammar now serves the student’s own plan.</a:t>
             </a:r>
             <a:endParaRPr lang="en-US" dirty="0"/>
@@ -1788,7 +1808,11 @@
           <a:lstStyle/>
           <a:p>
             <a:r>
-              <a:rPr lang="en-US" dirty="0"/>
+              <a:rPr lang="ar-SA" dirty="0">
+                <a:latin typeface="Amiri" pitchFamily="2" charset="-78"/>
+                <a:ea typeface="Amiri" pitchFamily="2" charset="-78"/>
+                <a:cs typeface="Amiri" pitchFamily="2" charset="-78"/>
+              </a:rPr>
               <a:t>SPEAKING (4 min) — teacher-made prompts on today’s vocabulary. ● 10 s think → ↔ 45 s rehearse muted → ◎ two pairs on open mic → ↺ one student summarises (نُقْطَةُ قُوَّتِهِ … · هَدَفُهُ أَنْ …). To a girl: قُوَّتِكِ · عِنْدَكِ · هَدَفُكِ.</a:t>
             </a:r>
             <a:endParaRPr lang="en-US" dirty="0"/>
@@ -1964,7 +1988,11 @@
           <a:lstStyle/>
           <a:p>
             <a:r>
-              <a:rPr lang="en-US" dirty="0"/>
+              <a:rPr lang="ar-SA" dirty="0">
+                <a:latin typeface="Amiri" pitchFamily="2" charset="-78"/>
+                <a:ea typeface="Amiri" pitchFamily="2" charset="-78"/>
+                <a:cs typeface="Amiri" pitchFamily="2" charset="-78"/>
+              </a:rPr>
               <a:t>Frames on today’s vocabulary and the P5 structures. Develop frame 4 (law … la-) is a reflection: لَوْ رَاجَعْتُ مُبَكِّرًا، لَأَتْقَنْتُ القَوَاعِدَ.</a:t>
             </a:r>
             <a:endParaRPr lang="en-US" dirty="0"/>
@@ -2052,7 +2080,11 @@
           <a:lstStyle/>
           <a:p>
             <a:r>
-              <a:rPr lang="en-US" dirty="0"/>
+              <a:rPr lang="ar-SA" dirty="0">
+                <a:latin typeface="Amiri" pitchFamily="2" charset="-78"/>
+                <a:ea typeface="Amiri" pitchFamily="2" charset="-78"/>
+                <a:cs typeface="Amiri" pitchFamily="2" charset="-78"/>
+              </a:rPr>
               <a:t>JOURNEY REFLECTION (3 min) — the website exit frames. Note: after أَسْتَطِيعُ أَنْ the verb ends in -a (أَكْتُبَ) — the P4 subjunctive, used about themselves. Invite two or three students to read theirs aloud (by invitation). A moment to celebrate how far they have come.
 Website: In F1 you learned to write the letter ب. Today you can construct a formal Arabic argument. Name that journey. (My Arabic journey)</a:t>
             </a:r>
@@ -2497,7 +2529,11 @@
           <a:lstStyle/>
           <a:p>
             <a:r>
-              <a:rPr lang="en-US" dirty="0"/>
+              <a:rPr lang="ar-SA" dirty="0">
+                <a:latin typeface="Amiri" pitchFamily="2" charset="-78"/>
+                <a:ea typeface="Amiri" pitchFamily="2" charset="-78"/>
+                <a:cs typeface="Amiri" pitchFamily="2" charset="-78"/>
+              </a:rPr>
               <a:t>DO NOW (5 min independent + 2 min going through answers).
 Questions 1–3 test three of the five words prepared at the end of P5-L12. Questions 4–5 retrieve the two P5 accuracy rules (ṣaḥīḥun anna + a fact; an + -a) — today students use an + -a for their targets: هَدَفِي أَنْ أُحَسِّنَ …
 • Students work silently. Answers go in the chat as five letters only when the timer ends.
@@ -2771,7 +2807,11 @@
           <a:lstStyle/>
           <a:p>
             <a:r>
-              <a:rPr lang="en-US" dirty="0"/>
+              <a:rPr lang="ar-SA" dirty="0">
+                <a:latin typeface="Amiri" pitchFamily="2" charset="-78"/>
+                <a:ea typeface="Amiri" pitchFamily="2" charset="-78"/>
+                <a:cs typeface="Amiri" pitchFamily="2" charset="-78"/>
+              </a:rPr>
               <a:t>KEY WORDS — HOW TO TEACH EACH GROUP (EAL pre-teaching routine, 7 min)
 1. HEAR IT: say the word twice, clearly, with a gesture where possible.
 2. SAY IT: choral repetition — “I say, you say” — then two volunteers.
@@ -2866,7 +2906,11 @@
           <a:lstStyle/>
           <a:p>
             <a:r>
-              <a:rPr lang="en-US" dirty="0"/>
+              <a:rPr lang="ar-SA" dirty="0">
+                <a:latin typeface="Amiri" pitchFamily="2" charset="-78"/>
+                <a:ea typeface="Amiri" pitchFamily="2" charset="-78"/>
+                <a:cs typeface="Amiri" pitchFamily="2" charset="-78"/>
+              </a:rPr>
               <a:t>KEY WORDS — Papers and components (website vocabulary (1 of 2)). Hear → Say → See → Use. Transliteration is printed for Core students (cover it for Develop/Stretch).
 Papers: the ordinal numbers are feminine because وَرَقَةٌ is feminine — الوَرَقَةُ الأُولَى · الثَّانِيَةُ · الثَّالِثَةُ · الرَّابِعَةُ. مَعَايِيرُ (sg. مِعْيَارٌ) are the criteria the examiner uses — Task Completion, Range, Accuracy.</a:t>
             </a:r>
@@ -2955,7 +2999,11 @@
           <a:lstStyle/>
           <a:p>
             <a:r>
-              <a:rPr lang="en-US" dirty="0"/>
+              <a:rPr lang="ar-SA" dirty="0">
+                <a:latin typeface="Amiri" pitchFamily="2" charset="-78"/>
+                <a:ea typeface="Amiri" pitchFamily="2" charset="-78"/>
+                <a:cs typeface="Amiri" pitchFamily="2" charset="-78"/>
+              </a:rPr>
               <a:t>KEY WORDS — Papers and components (website vocabulary (2 of 2)). Hear → Say → See → Use. Transliteration is printed for Core students (cover it for Develop/Stretch).
 Papers: the ordinal numbers are feminine because وَرَقَةٌ is feminine — الوَرَقَةُ الأُولَى · الثَّانِيَةُ · الثَّالِثَةُ · الرَّابِعَةُ. مَعَايِيرُ (sg. مِعْيَارٌ) are the criteria the examiner uses — Task Completion, Range, Accuracy.</a:t>
             </a:r>
@@ -3440,6 +3488,7 @@
                   <a:srgbClr val="D4AF37"/>
                 </a:solidFill>
                 <a:latin typeface="Amiri" pitchFamily="2" charset="-78"/>
+                <a:ea typeface="Amiri" pitchFamily="2" charset="-78"/>
                 <a:cs typeface="Amiri" pitchFamily="2" charset="-78"/>
               </a:rPr>
               <a:t>م</a:t>
@@ -3646,6 +3695,7 @@
                   <a:srgbClr val="D4AF37"/>
                 </a:solidFill>
                 <a:latin typeface="Amiri" pitchFamily="2" charset="-78"/>
+                <a:ea typeface="Amiri" pitchFamily="2" charset="-78"/>
                 <a:cs typeface="Amiri" pitchFamily="2" charset="-78"/>
               </a:rPr>
               <a:t>إِطْلَاقُ الجِسْرِ — رَسْمُ خَرِيطَةِ الامْتِحَانِ وَتَحْدِيدُ الأَهْدَافِ</a:t>
@@ -4103,6 +4153,7 @@
                   <a:srgbClr val="D4AF37"/>
                 </a:solidFill>
                 <a:latin typeface="Amiri" pitchFamily="2" charset="-78"/>
+                <a:ea typeface="Amiri" pitchFamily="2" charset="-78"/>
                 <a:cs typeface="Amiri" pitchFamily="2" charset="-78"/>
               </a:rPr>
               <a:t>م</a:t>
@@ -4423,6 +4474,7 @@
                   <a:srgbClr val="8A6D1E"/>
                 </a:solidFill>
                 <a:latin typeface="Amiri" pitchFamily="2" charset="-78"/>
+                <a:ea typeface="Amiri" pitchFamily="2" charset="-78"/>
                 <a:cs typeface="Amiri" pitchFamily="2" charset="-78"/>
               </a:rPr>
               <a:t>كَلِمَاتُ الدَّرْسِ</a:t>
@@ -4596,6 +4648,7 @@
                   <a:srgbClr val="1B3B6F"/>
                 </a:solidFill>
                 <a:latin typeface="Amiri" pitchFamily="2" charset="-78"/>
+                <a:ea typeface="Amiri" pitchFamily="2" charset="-78"/>
                 <a:cs typeface="Amiri" pitchFamily="2" charset="-78"/>
               </a:rPr>
               <a:t>التَّقْيِيمُ الذَّاتِيُّ</a:t>
@@ -4915,6 +4968,7 @@
                   <a:srgbClr val="1B3B6F"/>
                 </a:solidFill>
                 <a:latin typeface="Amiri" pitchFamily="2" charset="-78"/>
+                <a:ea typeface="Amiri" pitchFamily="2" charset="-78"/>
                 <a:cs typeface="Amiri" pitchFamily="2" charset="-78"/>
               </a:rPr>
               <a:t>نُقْطَةُ قُوَّةٍ</a:t>
@@ -5072,6 +5126,7 @@
                   <a:srgbClr val="1B3B6F"/>
                 </a:solidFill>
                 <a:latin typeface="Amiri" pitchFamily="2" charset="-78"/>
+                <a:ea typeface="Amiri" pitchFamily="2" charset="-78"/>
                 <a:cs typeface="Amiri" pitchFamily="2" charset="-78"/>
               </a:rPr>
               <a:t>نِقَاطُ قُوَّةٍ</a:t>
@@ -5337,6 +5392,7 @@
                   <a:srgbClr val="1B3B6F"/>
                 </a:solidFill>
                 <a:latin typeface="Amiri" pitchFamily="2" charset="-78"/>
+                <a:ea typeface="Amiri" pitchFamily="2" charset="-78"/>
                 <a:cs typeface="Amiri" pitchFamily="2" charset="-78"/>
               </a:rPr>
               <a:t>مَجَالُ تَحْسِينٍ</a:t>
@@ -5494,6 +5550,7 @@
                   <a:srgbClr val="1B3B6F"/>
                 </a:solidFill>
                 <a:latin typeface="Amiri" pitchFamily="2" charset="-78"/>
+                <a:ea typeface="Amiri" pitchFamily="2" charset="-78"/>
                 <a:cs typeface="Amiri" pitchFamily="2" charset="-78"/>
               </a:rPr>
               <a:t>مَجَالَاتُ تَحْسِينٍ</a:t>
@@ -5759,6 +5816,7 @@
                   <a:srgbClr val="1B3B6F"/>
                 </a:solidFill>
                 <a:latin typeface="Amiri" pitchFamily="2" charset="-78"/>
+                <a:ea typeface="Amiri" pitchFamily="2" charset="-78"/>
                 <a:cs typeface="Amiri" pitchFamily="2" charset="-78"/>
               </a:rPr>
               <a:t>هَدَفٌ مُحَدَّدٌ</a:t>
@@ -5916,6 +5974,7 @@
                   <a:srgbClr val="1B3B6F"/>
                 </a:solidFill>
                 <a:latin typeface="Amiri" pitchFamily="2" charset="-78"/>
+                <a:ea typeface="Amiri" pitchFamily="2" charset="-78"/>
                 <a:cs typeface="Amiri" pitchFamily="2" charset="-78"/>
               </a:rPr>
               <a:t>أَهْدَافٌ مُحَدَّدَةٌ</a:t>
@@ -6049,6 +6108,7 @@
                   <a:srgbClr val="D4AF37"/>
                 </a:solidFill>
                 <a:latin typeface="Amiri" pitchFamily="2" charset="-78"/>
+                <a:ea typeface="Amiri" pitchFamily="2" charset="-78"/>
                 <a:cs typeface="Amiri" pitchFamily="2" charset="-78"/>
               </a:rPr>
               <a:t>م</a:t>
@@ -6369,6 +6429,7 @@
                   <a:srgbClr val="8A6D1E"/>
                 </a:solidFill>
                 <a:latin typeface="Amiri" pitchFamily="2" charset="-78"/>
+                <a:ea typeface="Amiri" pitchFamily="2" charset="-78"/>
                 <a:cs typeface="Amiri" pitchFamily="2" charset="-78"/>
               </a:rPr>
               <a:t>كَلِمَاتُ الدَّرْسِ</a:t>
@@ -6607,6 +6668,7 @@
                   <a:srgbClr val="1B3B6F"/>
                 </a:solidFill>
                 <a:latin typeface="Amiri" pitchFamily="2" charset="-78"/>
+                <a:ea typeface="Amiri" pitchFamily="2" charset="-78"/>
                 <a:cs typeface="Amiri" pitchFamily="2" charset="-78"/>
               </a:rPr>
               <a:t>خُطَّةُ المُرَاجَعَةِ</a:t>
@@ -6796,6 +6858,7 @@
                   <a:srgbClr val="1B3B6F"/>
                 </a:solidFill>
                 <a:latin typeface="Amiri" pitchFamily="2" charset="-78"/>
+                <a:ea typeface="Amiri" pitchFamily="2" charset="-78"/>
                 <a:cs typeface="Amiri" pitchFamily="2" charset="-78"/>
               </a:rPr>
               <a:t>كِفَاءَةُ اللُّغَةِ</a:t>
@@ -7050,6 +7113,7 @@
                   <a:srgbClr val="1B3B6F"/>
                 </a:solidFill>
                 <a:latin typeface="Amiri" pitchFamily="2" charset="-78"/>
+                <a:ea typeface="Amiri" pitchFamily="2" charset="-78"/>
                 <a:cs typeface="Amiri" pitchFamily="2" charset="-78"/>
               </a:rPr>
               <a:t>إِتْقَانٌ</a:t>
@@ -7239,6 +7303,7 @@
                   <a:srgbClr val="1B3B6F"/>
                 </a:solidFill>
                 <a:latin typeface="Amiri" pitchFamily="2" charset="-78"/>
+                <a:ea typeface="Amiri" pitchFamily="2" charset="-78"/>
                 <a:cs typeface="Amiri" pitchFamily="2" charset="-78"/>
               </a:rPr>
               <a:t>تَحْقِيقُ الأَهْدَافِ</a:t>
@@ -7426,6 +7491,7 @@
                   <a:srgbClr val="D4AF37"/>
                 </a:solidFill>
                 <a:latin typeface="Amiri" pitchFamily="2" charset="-78"/>
+                <a:ea typeface="Amiri" pitchFamily="2" charset="-78"/>
                 <a:cs typeface="Amiri" pitchFamily="2" charset="-78"/>
               </a:rPr>
               <a:t>م</a:t>
@@ -7746,6 +7812,7 @@
                   <a:srgbClr val="8A6D1E"/>
                 </a:solidFill>
                 <a:latin typeface="Amiri" pitchFamily="2" charset="-78"/>
+                <a:ea typeface="Amiri" pitchFamily="2" charset="-78"/>
                 <a:cs typeface="Amiri" pitchFamily="2" charset="-78"/>
               </a:rPr>
               <a:t>الامْتِحَانُ الدَّوْلِيُّ</a:t>
@@ -8370,6 +8437,7 @@
                   <a:srgbClr val="1B3B6F"/>
                 </a:solidFill>
                 <a:latin typeface="Amiri" pitchFamily="2" charset="-78"/>
+                <a:ea typeface="Amiri" pitchFamily="2" charset="-78"/>
                 <a:cs typeface="Amiri" pitchFamily="2" charset="-78"/>
               </a:rPr>
               <a:t>أَرْبَعُ أَوْرَاقٍ لِأَرْبَعِ مَهَارَاتٍ</a:t>
@@ -8469,6 +8537,7 @@
                   <a:srgbClr val="1B3B6F"/>
                 </a:solidFill>
                 <a:latin typeface="Amiri" pitchFamily="2" charset="-78"/>
+                <a:ea typeface="Amiri" pitchFamily="2" charset="-78"/>
                 <a:cs typeface="Amiri" pitchFamily="2" charset="-78"/>
               </a:rPr>
               <a:t>مِئَةٌ وَخَمْسُونَ دَرَجَةً</a:t>
@@ -8568,6 +8637,7 @@
                   <a:srgbClr val="1B3B6F"/>
                 </a:solidFill>
                 <a:latin typeface="Amiri" pitchFamily="2" charset="-78"/>
+                <a:ea typeface="Amiri" pitchFamily="2" charset="-78"/>
                 <a:cs typeface="Amiri" pitchFamily="2" charset="-78"/>
               </a:rPr>
               <a:t>مِنَ الحَرْفِ إِلَى الحُجَّةِ</a:t>
@@ -8739,6 +8809,7 @@
                   <a:srgbClr val="D4AF37"/>
                 </a:solidFill>
                 <a:latin typeface="Amiri" pitchFamily="2" charset="-78"/>
+                <a:ea typeface="Amiri" pitchFamily="2" charset="-78"/>
                 <a:cs typeface="Amiri" pitchFamily="2" charset="-78"/>
               </a:rPr>
               <a:t>م</a:t>
@@ -9059,6 +9130,7 @@
                   <a:srgbClr val="8A6D1E"/>
                 </a:solidFill>
                 <a:latin typeface="Amiri" pitchFamily="2" charset="-78"/>
+                <a:ea typeface="Amiri" pitchFamily="2" charset="-78"/>
                 <a:cs typeface="Amiri" pitchFamily="2" charset="-78"/>
               </a:rPr>
               <a:t>الأَوْرَاقُ الأَرْبَعُ</a:t>
@@ -10828,6 +10900,7 @@
                   <a:srgbClr val="D4AF37"/>
                 </a:solidFill>
                 <a:latin typeface="Amiri" pitchFamily="2" charset="-78"/>
+                <a:ea typeface="Amiri" pitchFamily="2" charset="-78"/>
                 <a:cs typeface="Amiri" pitchFamily="2" charset="-78"/>
               </a:rPr>
               <a:t>م</a:t>
@@ -11148,6 +11221,7 @@
                   <a:srgbClr val="8A6D1E"/>
                 </a:solidFill>
                 <a:latin typeface="Amiri" pitchFamily="2" charset="-78"/>
+                <a:ea typeface="Amiri" pitchFamily="2" charset="-78"/>
                 <a:cs typeface="Amiri" pitchFamily="2" charset="-78"/>
               </a:rPr>
               <a:t>فَحْصٌ سَرِيعٌ</a:t>
@@ -13071,6 +13145,7 @@
                   <a:srgbClr val="D4AF37"/>
                 </a:solidFill>
                 <a:latin typeface="Amiri" pitchFamily="2" charset="-78"/>
+                <a:ea typeface="Amiri" pitchFamily="2" charset="-78"/>
                 <a:cs typeface="Amiri" pitchFamily="2" charset="-78"/>
               </a:rPr>
               <a:t>م</a:t>
@@ -13391,6 +13466,7 @@
                   <a:srgbClr val="8A6D1E"/>
                 </a:solidFill>
                 <a:latin typeface="Amiri" pitchFamily="2" charset="-78"/>
+                <a:ea typeface="Amiri" pitchFamily="2" charset="-78"/>
                 <a:cs typeface="Amiri" pitchFamily="2" charset="-78"/>
               </a:rPr>
               <a:t>الإِجَابَاتُ</a:t>
@@ -15574,6 +15650,7 @@
                   <a:srgbClr val="D4AF37"/>
                 </a:solidFill>
                 <a:latin typeface="Amiri" pitchFamily="2" charset="-78"/>
+                <a:ea typeface="Amiri" pitchFamily="2" charset="-78"/>
                 <a:cs typeface="Amiri" pitchFamily="2" charset="-78"/>
               </a:rPr>
               <a:t>م</a:t>
@@ -15894,6 +15971,7 @@
                   <a:srgbClr val="8A6D1E"/>
                 </a:solidFill>
                 <a:latin typeface="Amiri" pitchFamily="2" charset="-78"/>
+                <a:ea typeface="Amiri" pitchFamily="2" charset="-78"/>
                 <a:cs typeface="Amiri" pitchFamily="2" charset="-78"/>
               </a:rPr>
               <a:t>تَقْيِيمُ الجَاهِزِيَّةِ</a:t>
@@ -16250,6 +16328,7 @@
                   <a:srgbClr val="1B3B6F"/>
                 </a:solidFill>
                 <a:latin typeface="Amiri" pitchFamily="2" charset="-78"/>
+                <a:ea typeface="Amiri" pitchFamily="2" charset="-78"/>
                 <a:cs typeface="Amiri" pitchFamily="2" charset="-78"/>
               </a:rPr>
               <a:t>يَكْتُبُ / يَتَنَاوَلُ / يَسْتَمِعُ</a:t>
@@ -16429,6 +16508,7 @@
                   <a:srgbClr val="1B3B6F"/>
                 </a:solidFill>
                 <a:latin typeface="Amiri" pitchFamily="2" charset="-78"/>
+                <a:ea typeface="Amiri" pitchFamily="2" charset="-78"/>
                 <a:cs typeface="Amiri" pitchFamily="2" charset="-78"/>
               </a:rPr>
               <a:t>كَتَبَ / كَتَبُوا</a:t>
@@ -16608,6 +16688,7 @@
                   <a:srgbClr val="1B3B6F"/>
                 </a:solidFill>
                 <a:latin typeface="Amiri" pitchFamily="2" charset="-78"/>
+                <a:ea typeface="Amiri" pitchFamily="2" charset="-78"/>
                 <a:cs typeface="Amiri" pitchFamily="2" charset="-78"/>
               </a:rPr>
               <a:t>سَـ / سَوْفَ / لَنْ</a:t>
@@ -16787,6 +16868,7 @@
                   <a:srgbClr val="1B3B6F"/>
                 </a:solidFill>
                 <a:latin typeface="Amiri" pitchFamily="2" charset="-78"/>
+                <a:ea typeface="Amiri" pitchFamily="2" charset="-78"/>
                 <a:cs typeface="Amiri" pitchFamily="2" charset="-78"/>
               </a:rPr>
               <a:t>الَّذِي / الَّتِي</a:t>
@@ -16966,6 +17048,7 @@
                   <a:srgbClr val="1B3B6F"/>
                 </a:solidFill>
                 <a:latin typeface="Amiri" pitchFamily="2" charset="-78"/>
+                <a:ea typeface="Amiri" pitchFamily="2" charset="-78"/>
                 <a:cs typeface="Amiri" pitchFamily="2" charset="-78"/>
               </a:rPr>
               <a:t>أَفْعَلُ / أَكْثَرُ</a:t>
@@ -17145,6 +17228,7 @@
                   <a:srgbClr val="1B3B6F"/>
                 </a:solidFill>
                 <a:latin typeface="Amiri" pitchFamily="2" charset="-78"/>
+                <a:ea typeface="Amiri" pitchFamily="2" charset="-78"/>
                 <a:cs typeface="Amiri" pitchFamily="2" charset="-78"/>
               </a:rPr>
               <a:t>يُكْتَبُ / دُمِّرَتْ</a:t>
@@ -17324,6 +17408,7 @@
                   <a:srgbClr val="1B3B6F"/>
                 </a:solidFill>
                 <a:latin typeface="Amiri" pitchFamily="2" charset="-78"/>
+                <a:ea typeface="Amiri" pitchFamily="2" charset="-78"/>
                 <a:cs typeface="Amiri" pitchFamily="2" charset="-78"/>
               </a:rPr>
               <a:t>إِذَا … سَـ</a:t>
@@ -17503,6 +17588,7 @@
                   <a:srgbClr val="1B3B6F"/>
                 </a:solidFill>
                 <a:latin typeface="Amiri" pitchFamily="2" charset="-78"/>
+                <a:ea typeface="Amiri" pitchFamily="2" charset="-78"/>
                 <a:cs typeface="Amiri" pitchFamily="2" charset="-78"/>
               </a:rPr>
               <a:t>لَوْ … لَـ</a:t>
@@ -17712,6 +17798,7 @@
                   <a:srgbClr val="D4AF37"/>
                 </a:solidFill>
                 <a:latin typeface="Amiri" pitchFamily="2" charset="-78"/>
+                <a:ea typeface="Amiri" pitchFamily="2" charset="-78"/>
                 <a:cs typeface="Amiri" pitchFamily="2" charset="-78"/>
               </a:rPr>
               <a:t>م</a:t>
@@ -18032,6 +18119,7 @@
                   <a:srgbClr val="8A6D1E"/>
                 </a:solidFill>
                 <a:latin typeface="Amiri" pitchFamily="2" charset="-78"/>
+                <a:ea typeface="Amiri" pitchFamily="2" charset="-78"/>
                 <a:cs typeface="Amiri" pitchFamily="2" charset="-78"/>
               </a:rPr>
               <a:t>تَقْيِيمُ الجَاهِزِيَّةِ</a:t>
@@ -18388,6 +18476,7 @@
                   <a:srgbClr val="1B3B6F"/>
                 </a:solidFill>
                 <a:latin typeface="Amiri" pitchFamily="2" charset="-78"/>
+                <a:ea typeface="Amiri" pitchFamily="2" charset="-78"/>
                 <a:cs typeface="Amiri" pitchFamily="2" charset="-78"/>
               </a:rPr>
               <a:t>قَالَ إِنَّ / أَكَّدَ أَنَّ</a:t>
@@ -18567,6 +18656,7 @@
                   <a:srgbClr val="1B3B6F"/>
                 </a:solidFill>
                 <a:latin typeface="Amiri" pitchFamily="2" charset="-78"/>
+                <a:ea typeface="Amiri" pitchFamily="2" charset="-78"/>
                 <a:cs typeface="Amiri" pitchFamily="2" charset="-78"/>
               </a:rPr>
               <a:t>كَانَ قَدْ</a:t>
@@ -18746,6 +18836,7 @@
                   <a:srgbClr val="1B3B6F"/>
                 </a:solidFill>
                 <a:latin typeface="Amiri" pitchFamily="2" charset="-78"/>
+                <a:ea typeface="Amiri" pitchFamily="2" charset="-78"/>
                 <a:cs typeface="Amiri" pitchFamily="2" charset="-78"/>
               </a:rPr>
               <a:t>لِكَيْ</a:t>
@@ -18925,6 +19016,7 @@
                   <a:srgbClr val="1B3B6F"/>
                 </a:solidFill>
                 <a:latin typeface="Amiri" pitchFamily="2" charset="-78"/>
+                <a:ea typeface="Amiri" pitchFamily="2" charset="-78"/>
                 <a:cs typeface="Amiri" pitchFamily="2" charset="-78"/>
               </a:rPr>
               <a:t>يَنْبَغِي أَنْ</a:t>
@@ -19104,6 +19196,7 @@
                   <a:srgbClr val="1B3B6F"/>
                 </a:solidFill>
                 <a:latin typeface="Amiri" pitchFamily="2" charset="-78"/>
+                <a:ea typeface="Amiri" pitchFamily="2" charset="-78"/>
                 <a:cs typeface="Amiri" pitchFamily="2" charset="-78"/>
               </a:rPr>
               <a:t>يَتَطَلَّبُ / يُطَالِبُ بِأَنْ</a:t>
@@ -19283,6 +19376,7 @@
                   <a:srgbClr val="1B3B6F"/>
                 </a:solidFill>
                 <a:latin typeface="Amiri" pitchFamily="2" charset="-78"/>
+                <a:ea typeface="Amiri" pitchFamily="2" charset="-78"/>
                 <a:cs typeface="Amiri" pitchFamily="2" charset="-78"/>
               </a:rPr>
               <a:t>صَحِيحٌ أَنَّ</a:t>
@@ -19462,6 +19556,7 @@
                   <a:srgbClr val="1B3B6F"/>
                 </a:solidFill>
                 <a:latin typeface="Amiri" pitchFamily="2" charset="-78"/>
+                <a:ea typeface="Amiri" pitchFamily="2" charset="-78"/>
                 <a:cs typeface="Amiri" pitchFamily="2" charset="-78"/>
               </a:rPr>
               <a:t>غَيْرَ أَنَّ</a:t>
@@ -19641,6 +19736,7 @@
                   <a:srgbClr val="1B3B6F"/>
                 </a:solidFill>
                 <a:latin typeface="Amiri" pitchFamily="2" charset="-78"/>
+                <a:ea typeface="Amiri" pitchFamily="2" charset="-78"/>
                 <a:cs typeface="Amiri" pitchFamily="2" charset="-78"/>
               </a:rPr>
               <a:t>وَبِنَاءً عَلَى مَا سَبَقَ</a:t>
@@ -19850,6 +19946,7 @@
                   <a:srgbClr val="D4AF37"/>
                 </a:solidFill>
                 <a:latin typeface="Amiri" pitchFamily="2" charset="-78"/>
+                <a:ea typeface="Amiri" pitchFamily="2" charset="-78"/>
                 <a:cs typeface="Amiri" pitchFamily="2" charset="-78"/>
               </a:rPr>
               <a:t>م</a:t>
@@ -20170,6 +20267,7 @@
                   <a:srgbClr val="8A6D1E"/>
                 </a:solidFill>
                 <a:latin typeface="Amiri" pitchFamily="2" charset="-78"/>
+                <a:ea typeface="Amiri" pitchFamily="2" charset="-78"/>
                 <a:cs typeface="Amiri" pitchFamily="2" charset="-78"/>
               </a:rPr>
               <a:t>خَرِيطَةُ الجِسْرِ</a:t>
@@ -21364,6 +21462,7 @@
                   <a:srgbClr val="D4AF37"/>
                 </a:solidFill>
                 <a:latin typeface="Amiri" pitchFamily="2" charset="-78"/>
+                <a:ea typeface="Amiri" pitchFamily="2" charset="-78"/>
                 <a:cs typeface="Amiri" pitchFamily="2" charset="-78"/>
               </a:rPr>
               <a:t>م</a:t>
@@ -21684,6 +21783,7 @@
                   <a:srgbClr val="8A6D1E"/>
                 </a:solidFill>
                 <a:latin typeface="Amiri" pitchFamily="2" charset="-78"/>
+                <a:ea typeface="Amiri" pitchFamily="2" charset="-78"/>
                 <a:cs typeface="Amiri" pitchFamily="2" charset="-78"/>
               </a:rPr>
               <a:t>خَرِيطَةُ الجِسْرِ</a:t>
@@ -22737,6 +22837,7 @@
                   <a:srgbClr val="D4AF37"/>
                 </a:solidFill>
                 <a:latin typeface="Amiri" pitchFamily="2" charset="-78"/>
+                <a:ea typeface="Amiri" pitchFamily="2" charset="-78"/>
                 <a:cs typeface="Amiri" pitchFamily="2" charset="-78"/>
               </a:rPr>
               <a:t>م</a:t>
@@ -23057,6 +23158,7 @@
                   <a:srgbClr val="8A6D1E"/>
                 </a:solidFill>
                 <a:latin typeface="Amiri" pitchFamily="2" charset="-78"/>
+                <a:ea typeface="Amiri" pitchFamily="2" charset="-78"/>
                 <a:cs typeface="Amiri" pitchFamily="2" charset="-78"/>
               </a:rPr>
               <a:t>آدَابُ الصَّفِّ</a:t>
@@ -24588,6 +24690,7 @@
                   <a:srgbClr val="D4AF37"/>
                 </a:solidFill>
                 <a:latin typeface="Amiri" pitchFamily="2" charset="-78"/>
+                <a:ea typeface="Amiri" pitchFamily="2" charset="-78"/>
                 <a:cs typeface="Amiri" pitchFamily="2" charset="-78"/>
               </a:rPr>
               <a:t>م</a:t>
@@ -24908,6 +25011,7 @@
                   <a:srgbClr val="8A6D1E"/>
                 </a:solidFill>
                 <a:latin typeface="Amiri" pitchFamily="2" charset="-78"/>
+                <a:ea typeface="Amiri" pitchFamily="2" charset="-78"/>
                 <a:cs typeface="Amiri" pitchFamily="2" charset="-78"/>
               </a:rPr>
               <a:t>هَدَفٌ مُحَدَّدٌ</a:t>
@@ -25532,6 +25636,7 @@
                   <a:srgbClr val="1B3B6F"/>
                 </a:solidFill>
                 <a:latin typeface="Amiri" pitchFamily="2" charset="-78"/>
+                <a:ea typeface="Amiri" pitchFamily="2" charset="-78"/>
                 <a:cs typeface="Amiri" pitchFamily="2" charset="-78"/>
               </a:rPr>
               <a:t>هَدَفِي أَنْ أُحَسِّنَ دَرَجَتِي فِي الاسْتِمَاعِ</a:t>
@@ -25631,6 +25736,7 @@
                   <a:srgbClr val="1B3B6F"/>
                 </a:solidFill>
                 <a:latin typeface="Amiri" pitchFamily="2" charset="-78"/>
+                <a:ea typeface="Amiri" pitchFamily="2" charset="-78"/>
                 <a:cs typeface="Amiri" pitchFamily="2" charset="-78"/>
               </a:rPr>
               <a:t>وَيَتَطَلَّبُ ذٰلِكَ أَنْ أَقْرَأَ الأَسْئِلَةَ قَبْلَ الاسْتِمَاعِ</a:t>
@@ -25730,6 +25836,7 @@
                   <a:srgbClr val="1B3B6F"/>
                 </a:solidFill>
                 <a:latin typeface="Amiri" pitchFamily="2" charset="-78"/>
+                <a:ea typeface="Amiri" pitchFamily="2" charset="-78"/>
                 <a:cs typeface="Amiri" pitchFamily="2" charset="-78"/>
               </a:rPr>
               <a:t>وَلَوْ رَاجَعْتُ كُلَّ أُسْبُوعٍ، لَأَتْقَنْتُ القَوَاعِدَ</a:t>
@@ -26011,6 +26118,7 @@
                   <a:srgbClr val="D4AF37"/>
                 </a:solidFill>
                 <a:latin typeface="Amiri" pitchFamily="2" charset="-78"/>
+                <a:ea typeface="Amiri" pitchFamily="2" charset="-78"/>
                 <a:cs typeface="Amiri" pitchFamily="2" charset="-78"/>
               </a:rPr>
               <a:t>م</a:t>
@@ -26331,6 +26439,7 @@
                   <a:srgbClr val="8A6D1E"/>
                 </a:solidFill>
                 <a:latin typeface="Amiri" pitchFamily="2" charset="-78"/>
+                <a:ea typeface="Amiri" pitchFamily="2" charset="-78"/>
                 <a:cs typeface="Amiri" pitchFamily="2" charset="-78"/>
               </a:rPr>
               <a:t>أَهْدَافِي</a:t>
@@ -27308,6 +27417,7 @@
                   <a:srgbClr val="D4AF37"/>
                 </a:solidFill>
                 <a:latin typeface="Amiri" pitchFamily="2" charset="-78"/>
+                <a:ea typeface="Amiri" pitchFamily="2" charset="-78"/>
                 <a:cs typeface="Amiri" pitchFamily="2" charset="-78"/>
               </a:rPr>
               <a:t>م</a:t>
@@ -27628,6 +27738,7 @@
                   <a:srgbClr val="8A6D1E"/>
                 </a:solidFill>
                 <a:latin typeface="Amiri" pitchFamily="2" charset="-78"/>
+                <a:ea typeface="Amiri" pitchFamily="2" charset="-78"/>
                 <a:cs typeface="Amiri" pitchFamily="2" charset="-78"/>
               </a:rPr>
               <a:t>التَّحَدُّثُ</a:t>
@@ -28398,6 +28509,7 @@
                   <a:srgbClr val="1B3B6F"/>
                 </a:solidFill>
                 <a:latin typeface="Amiri" pitchFamily="2" charset="-78"/>
+                <a:ea typeface="Amiri" pitchFamily="2" charset="-78"/>
                 <a:cs typeface="Amiri" pitchFamily="2" charset="-78"/>
               </a:rPr>
               <a:t>مَا نُقْطَةُ قُوَّتِكَ فِي العَرَبِيَّةِ؟</a:t>
@@ -28535,6 +28647,7 @@
                   <a:srgbClr val="1B3B6F"/>
                 </a:solidFill>
                 <a:latin typeface="Amiri" pitchFamily="2" charset="-78"/>
+                <a:ea typeface="Amiri" pitchFamily="2" charset="-78"/>
                 <a:cs typeface="Amiri" pitchFamily="2" charset="-78"/>
               </a:rPr>
               <a:t>مَا مَجَالُ التَّحْسِينِ عِنْدَكَ، وَمَا هَدَفُكَ؟</a:t>
@@ -28672,6 +28785,7 @@
                   <a:srgbClr val="1B3B6F"/>
                 </a:solidFill>
                 <a:latin typeface="Amiri" pitchFamily="2" charset="-78"/>
+                <a:ea typeface="Amiri" pitchFamily="2" charset="-78"/>
                 <a:cs typeface="Amiri" pitchFamily="2" charset="-78"/>
               </a:rPr>
               <a:t>مَاذَا يَتَطَلَّبُ تَحْقِيقُ هَدَفِكَ؟</a:t>
@@ -28847,6 +28961,7 @@
                   <a:srgbClr val="1D5FBF"/>
                 </a:solidFill>
                 <a:latin typeface="Amiri" pitchFamily="2" charset="-78"/>
+                <a:ea typeface="Amiri" pitchFamily="2" charset="-78"/>
                 <a:cs typeface="Amiri" pitchFamily="2" charset="-78"/>
               </a:rPr>
               <a:t>نُقْطَةُ قُوَّتِي ___ .</a:t>
@@ -28950,6 +29065,7 @@
                   <a:srgbClr val="1F2A37"/>
                 </a:solidFill>
                 <a:latin typeface="Amiri" pitchFamily="2" charset="-78"/>
+                <a:ea typeface="Amiri" pitchFamily="2" charset="-78"/>
                 <a:cs typeface="Amiri" pitchFamily="2" charset="-78"/>
               </a:rPr>
               <a:t>مَجَالُ تَحْسِينِي ___ ، وَهَدَفِي أَنْ ___ .</a:t>
@@ -29053,6 +29169,7 @@
                   <a:srgbClr val="1F2A37"/>
                 </a:solidFill>
                 <a:latin typeface="Amiri" pitchFamily="2" charset="-78"/>
+                <a:ea typeface="Amiri" pitchFamily="2" charset="-78"/>
                 <a:cs typeface="Amiri" pitchFamily="2" charset="-78"/>
               </a:rPr>
               <a:t>يَتَطَلَّبُ تَحْقِيقُ هَدَفِي أَنْ ___ .</a:t>
@@ -29226,6 +29343,7 @@
                   <a:srgbClr val="1F2A37"/>
                 </a:solidFill>
                 <a:latin typeface="Amiri" pitchFamily="2" charset="-78"/>
+                <a:ea typeface="Amiri" pitchFamily="2" charset="-78"/>
                 <a:cs typeface="Amiri" pitchFamily="2" charset="-78"/>
               </a:rPr>
               <a:t>نُقْطَةُ قُوَّتِي القِرَاءَةُ، وَمَجَالُ تَحْسِينِي الاسْتِمَاعُ.</a:t>
@@ -29365,6 +29483,7 @@
                   <a:srgbClr val="1F2A37"/>
                 </a:solidFill>
                 <a:latin typeface="Amiri" pitchFamily="2" charset="-78"/>
+                <a:ea typeface="Amiri" pitchFamily="2" charset="-78"/>
                 <a:cs typeface="Amiri" pitchFamily="2" charset="-78"/>
               </a:rPr>
               <a:t>هَدَفِي أَنْ أُحَسِّنَ دَرَجَتِي، وَيَتَطَلَّبُ ذٰلِكَ أَنْ أَقْرَأَ الأَسْئِلَةَ أَوَّلًا.</a:t>
@@ -29536,6 +29655,7 @@
                   <a:srgbClr val="D4AF37"/>
                 </a:solidFill>
                 <a:latin typeface="Amiri" pitchFamily="2" charset="-78"/>
+                <a:ea typeface="Amiri" pitchFamily="2" charset="-78"/>
                 <a:cs typeface="Amiri" pitchFamily="2" charset="-78"/>
               </a:rPr>
               <a:t>م</a:t>
@@ -29856,6 +29976,7 @@
                   <a:srgbClr val="8A6D1E"/>
                 </a:solidFill>
                 <a:latin typeface="Amiri" pitchFamily="2" charset="-78"/>
+                <a:ea typeface="Amiri" pitchFamily="2" charset="-78"/>
                 <a:cs typeface="Amiri" pitchFamily="2" charset="-78"/>
               </a:rPr>
               <a:t>اُكْتُبْ</a:t>
@@ -30031,6 +30152,7 @@
                   <a:srgbClr val="2E8B57"/>
                 </a:solidFill>
                 <a:latin typeface="Amiri" pitchFamily="2" charset="-78"/>
+                <a:ea typeface="Amiri" pitchFamily="2" charset="-78"/>
                 <a:cs typeface="Amiri" pitchFamily="2" charset="-78"/>
               </a:rPr>
               <a:t>الأَسَاسُ</a:t>
@@ -30183,11 +30305,12 @@
               <a:buNone/>
             </a:pPr>
             <a:r>
-              <a:rPr lang="en-US" sz="1150" dirty="0">
+              <a:rPr lang="ar-SA" sz="1150" dirty="0">
                 <a:solidFill>
                   <a:srgbClr val="1F2A37"/>
                 </a:solidFill>
                 <a:latin typeface="Calibri" pitchFamily="34" charset="0"/>
+                <a:ea typeface="Amiri" pitchFamily="2" charset="-78"/>
                 <a:cs typeface="Amiri" pitchFamily="2" charset="-78"/>
               </a:rPr>
               <a:t>Use the frames slide. Check: the verb after أَنْ ends in -a.</a:t>
@@ -30325,6 +30448,7 @@
                   <a:srgbClr val="C9780A"/>
                 </a:solidFill>
                 <a:latin typeface="Amiri" pitchFamily="2" charset="-78"/>
+                <a:ea typeface="Amiri" pitchFamily="2" charset="-78"/>
                 <a:cs typeface="Amiri" pitchFamily="2" charset="-78"/>
               </a:rPr>
               <a:t>التَّطْوِيرُ</a:t>
@@ -30619,6 +30743,7 @@
                   <a:srgbClr val="B83227"/>
                 </a:solidFill>
                 <a:latin typeface="Amiri" pitchFamily="2" charset="-78"/>
+                <a:ea typeface="Amiri" pitchFamily="2" charset="-78"/>
                 <a:cs typeface="Amiri" pitchFamily="2" charset="-78"/>
               </a:rPr>
               <a:t>التَّحَدِّي</a:t>
@@ -30909,6 +31034,7 @@
                   <a:srgbClr val="D4AF37"/>
                 </a:solidFill>
                 <a:latin typeface="Amiri" pitchFamily="2" charset="-78"/>
+                <a:ea typeface="Amiri" pitchFamily="2" charset="-78"/>
                 <a:cs typeface="Amiri" pitchFamily="2" charset="-78"/>
               </a:rPr>
               <a:t>م</a:t>
@@ -31229,6 +31355,7 @@
                   <a:srgbClr val="8A6D1E"/>
                 </a:solidFill>
                 <a:latin typeface="Amiri" pitchFamily="2" charset="-78"/>
+                <a:ea typeface="Amiri" pitchFamily="2" charset="-78"/>
                 <a:cs typeface="Amiri" pitchFamily="2" charset="-78"/>
               </a:rPr>
               <a:t>قَوَالِبُ الجُمَلِ</a:t>
@@ -31404,6 +31531,7 @@
                   <a:srgbClr val="1B3B6F"/>
                 </a:solidFill>
                 <a:latin typeface="Amiri" pitchFamily="2" charset="-78"/>
+                <a:ea typeface="Amiri" pitchFamily="2" charset="-78"/>
                 <a:cs typeface="Amiri" pitchFamily="2" charset="-78"/>
               </a:rPr>
               <a:t>يَتَطَلَّبُ تَحْقِيقُ هَدَفِي أَنْ ______ .</a:t>
@@ -31480,6 +31608,7 @@
                   <a:srgbClr val="1B3B6F"/>
                 </a:solidFill>
                 <a:latin typeface="Amiri" pitchFamily="2" charset="-78"/>
+                <a:ea typeface="Amiri" pitchFamily="2" charset="-78"/>
                 <a:cs typeface="Amiri" pitchFamily="2" charset="-78"/>
               </a:rPr>
               <a:t>يَنْبَغِي أَنْ ______ قَبْلَ الامْتِحَانِ.</a:t>
@@ -31556,6 +31685,7 @@
                   <a:srgbClr val="1B3B6F"/>
                 </a:solidFill>
                 <a:latin typeface="Amiri" pitchFamily="2" charset="-78"/>
+                <a:ea typeface="Amiri" pitchFamily="2" charset="-78"/>
                 <a:cs typeface="Amiri" pitchFamily="2" charset="-78"/>
               </a:rPr>
               <a:t>صَحِيحٌ أَنَّ ______ ، غَيْرَ أَنَّ ______ .</a:t>
@@ -31632,6 +31762,7 @@
                   <a:srgbClr val="1B3B6F"/>
                 </a:solidFill>
                 <a:latin typeface="Amiri" pitchFamily="2" charset="-78"/>
+                <a:ea typeface="Amiri" pitchFamily="2" charset="-78"/>
                 <a:cs typeface="Amiri" pitchFamily="2" charset="-78"/>
               </a:rPr>
               <a:t>لَوْ رَاجَعْتُ مُبَكِّرًا، لَأَتْقَنْتُ ______ .</a:t>
@@ -31807,6 +31938,7 @@
                   <a:srgbClr val="1B3B6F"/>
                 </a:solidFill>
                 <a:latin typeface="Amiri" pitchFamily="2" charset="-78"/>
+                <a:ea typeface="Amiri" pitchFamily="2" charset="-78"/>
                 <a:cs typeface="Amiri" pitchFamily="2" charset="-78"/>
               </a:rPr>
               <a:t>نُقْطَةُ قُوَّتِي ______ .</a:t>
@@ -31883,6 +32015,7 @@
                   <a:srgbClr val="1B3B6F"/>
                 </a:solidFill>
                 <a:latin typeface="Amiri" pitchFamily="2" charset="-78"/>
+                <a:ea typeface="Amiri" pitchFamily="2" charset="-78"/>
                 <a:cs typeface="Amiri" pitchFamily="2" charset="-78"/>
               </a:rPr>
               <a:t>مَجَالُ تَحْسِينِي ______ .</a:t>
@@ -31959,6 +32092,7 @@
                   <a:srgbClr val="1B3B6F"/>
                 </a:solidFill>
                 <a:latin typeface="Amiri" pitchFamily="2" charset="-78"/>
+                <a:ea typeface="Amiri" pitchFamily="2" charset="-78"/>
                 <a:cs typeface="Amiri" pitchFamily="2" charset="-78"/>
               </a:rPr>
               <a:t>هَدَفِي أَنْ أُحَسِّنَ ______ .</a:t>
@@ -32035,6 +32169,7 @@
                   <a:srgbClr val="1B3B6F"/>
                 </a:solidFill>
                 <a:latin typeface="Amiri" pitchFamily="2" charset="-78"/>
+                <a:ea typeface="Amiri" pitchFamily="2" charset="-78"/>
                 <a:cs typeface="Amiri" pitchFamily="2" charset="-78"/>
               </a:rPr>
               <a:t>سَأُرَاجِعُ ______ كُلَّ أُسْبُوعٍ.</a:t>
@@ -32183,6 +32318,7 @@
                   <a:srgbClr val="1B3B6F"/>
                 </a:solidFill>
                 <a:latin typeface="Amiri" pitchFamily="2" charset="-78"/>
+                <a:ea typeface="Amiri" pitchFamily="2" charset="-78"/>
                 <a:cs typeface="Amiri" pitchFamily="2" charset="-78"/>
               </a:rPr>
               <a:t>القِرَاءَةُ  ·  الاسْتِمَاعُ  ·  التَّحَدُّثُ  ·  الكِتَابَةُ  ·  دَرَجَتِي  ·  أَقْرَأَ الأَسْئِلَةَ أَوَّلًا  ·  أُرَاجِعَ القَوَاعِدَ  ·  أُخَطِّطَ لِلْمَقَالِ  ·  المُضَارِعَ المَنْصُوبَ  ·  الشَّرْطَ  ·  الوَقْتَ مَحْدُودٌ  ·  الإِتْقَانَ مُمْكِنٌ</a:t>
@@ -32316,6 +32452,7 @@
                   <a:srgbClr val="D4AF37"/>
                 </a:solidFill>
                 <a:latin typeface="Amiri" pitchFamily="2" charset="-78"/>
+                <a:ea typeface="Amiri" pitchFamily="2" charset="-78"/>
                 <a:cs typeface="Amiri" pitchFamily="2" charset="-78"/>
               </a:rPr>
               <a:t>م</a:t>
@@ -32636,6 +32773,7 @@
                   <a:srgbClr val="8A6D1E"/>
                 </a:solidFill>
                 <a:latin typeface="Amiri" pitchFamily="2" charset="-78"/>
+                <a:ea typeface="Amiri" pitchFamily="2" charset="-78"/>
                 <a:cs typeface="Amiri" pitchFamily="2" charset="-78"/>
               </a:rPr>
               <a:t>رِحْلَتِي مَعَ العَرَبِيَّةِ</a:t>
@@ -32878,6 +33016,7 @@
                   <a:srgbClr val="1B3B6F"/>
                 </a:solidFill>
                 <a:latin typeface="Amiri" pitchFamily="2" charset="-78"/>
+                <a:ea typeface="Amiri" pitchFamily="2" charset="-78"/>
                 <a:cs typeface="Amiri" pitchFamily="2" charset="-78"/>
               </a:rPr>
               <a:t>حَرْفِ البَاءِ</a:t>
@@ -32954,6 +33093,7 @@
                   <a:srgbClr val="1B3B6F"/>
                 </a:solidFill>
                 <a:latin typeface="Amiri" pitchFamily="2" charset="-78"/>
+                <a:ea typeface="Amiri" pitchFamily="2" charset="-78"/>
                 <a:cs typeface="Amiri" pitchFamily="2" charset="-78"/>
               </a:rPr>
               <a:t>بَدَأْتُ رِحْلَتِي مَعَ العَرَبِيَّةِ بِـ…</a:t>
@@ -33019,6 +33159,7 @@
                   <a:srgbClr val="1B3B6F"/>
                 </a:solidFill>
                 <a:latin typeface="Amiri" pitchFamily="2" charset="-78"/>
+                <a:ea typeface="Amiri" pitchFamily="2" charset="-78"/>
                 <a:cs typeface="Amiri" pitchFamily="2" charset="-78"/>
               </a:rPr>
               <a:t>أَكْتُبَ مَقَالًا حِجَاجِيًّا</a:t>
@@ -33095,6 +33236,7 @@
                   <a:srgbClr val="1B3B6F"/>
                 </a:solidFill>
                 <a:latin typeface="Amiri" pitchFamily="2" charset="-78"/>
+                <a:ea typeface="Amiri" pitchFamily="2" charset="-78"/>
                 <a:cs typeface="Amiri" pitchFamily="2" charset="-78"/>
               </a:rPr>
               <a:t>وَاليَوْمَ أَسْتَطِيعُ أَنْ…</a:t>
@@ -33160,6 +33302,7 @@
                   <a:srgbClr val="1B3B6F"/>
                 </a:solidFill>
                 <a:latin typeface="Amiri" pitchFamily="2" charset="-78"/>
+                <a:ea typeface="Amiri" pitchFamily="2" charset="-78"/>
                 <a:cs typeface="Amiri" pitchFamily="2" charset="-78"/>
               </a:rPr>
               <a:t>أُحَقِّقَ أَعْلَى دَرَجَةٍ</a:t>
@@ -33236,6 +33379,7 @@
                   <a:srgbClr val="1B3B6F"/>
                 </a:solidFill>
                 <a:latin typeface="Amiri" pitchFamily="2" charset="-78"/>
+                <a:ea typeface="Amiri" pitchFamily="2" charset="-78"/>
                 <a:cs typeface="Amiri" pitchFamily="2" charset="-78"/>
               </a:rPr>
               <a:t>وَهَدَفِي فِي الامْتِحَانِ أَنْ ______ .</a:t>
@@ -33287,6 +33431,7 @@
                   <a:srgbClr val="1B3B6F"/>
                 </a:solidFill>
                 <a:latin typeface="Amiri" pitchFamily="2" charset="-78"/>
+                <a:ea typeface="Amiri" pitchFamily="2" charset="-78"/>
                 <a:cs typeface="Amiri" pitchFamily="2" charset="-78"/>
               </a:rPr>
               <a:t>ب</a:t>
@@ -33433,6 +33578,7 @@
                   <a:srgbClr val="D4AF37"/>
                 </a:solidFill>
                 <a:latin typeface="Amiri" pitchFamily="2" charset="-78"/>
+                <a:ea typeface="Amiri" pitchFamily="2" charset="-78"/>
                 <a:cs typeface="Amiri" pitchFamily="2" charset="-78"/>
               </a:rPr>
               <a:t>م</a:t>
@@ -33753,6 +33899,7 @@
                   <a:srgbClr val="8A6D1E"/>
                 </a:solidFill>
                 <a:latin typeface="Amiri" pitchFamily="2" charset="-78"/>
+                <a:ea typeface="Amiri" pitchFamily="2" charset="-78"/>
                 <a:cs typeface="Amiri" pitchFamily="2" charset="-78"/>
               </a:rPr>
               <a:t>قَيِّمْ عَمَلَكَ</a:t>
@@ -34910,6 +35057,7 @@
                   <a:srgbClr val="D4AF37"/>
                 </a:solidFill>
                 <a:latin typeface="Amiri" pitchFamily="2" charset="-78"/>
+                <a:ea typeface="Amiri" pitchFamily="2" charset="-78"/>
                 <a:cs typeface="Amiri" pitchFamily="2" charset="-78"/>
               </a:rPr>
               <a:t>م</a:t>
@@ -35230,6 +35378,7 @@
                   <a:srgbClr val="8A6D1E"/>
                 </a:solidFill>
                 <a:latin typeface="Amiri" pitchFamily="2" charset="-78"/>
+                <a:ea typeface="Amiri" pitchFamily="2" charset="-78"/>
                 <a:cs typeface="Amiri" pitchFamily="2" charset="-78"/>
               </a:rPr>
               <a:t>التَّحْضِيرُ لِلدَّرْسِ القَادِمِ</a:t>
@@ -35443,6 +35592,7 @@
                   <a:srgbClr val="1B3B6F"/>
                 </a:solidFill>
                 <a:latin typeface="Amiri" pitchFamily="2" charset="-78"/>
+                <a:ea typeface="Amiri" pitchFamily="2" charset="-78"/>
                 <a:cs typeface="Amiri" pitchFamily="2" charset="-78"/>
               </a:rPr>
               <a:t>اسْتِرَاتِيجِيَّاتُ الاسْتِمَاعِ</a:t>
@@ -35489,11 +35639,12 @@
               <a:buNone/>
             </a:pPr>
             <a:r>
-              <a:rPr lang="en-US" sz="1000" i="1" dirty="0">
+              <a:rPr lang="ar-SA" sz="1000" i="1" dirty="0">
                 <a:solidFill>
                   <a:srgbClr val="5A6472"/>
                 </a:solidFill>
                 <a:latin typeface="Calibri" pitchFamily="34" charset="0"/>
+                <a:ea typeface="Amiri" pitchFamily="2" charset="-78"/>
                 <a:cs typeface="Amiri" pitchFamily="2" charset="-78"/>
               </a:rPr>
               <a:t>  sg. اسْتِرَاتِيجِيَّةٌ</a:t>
@@ -35532,6 +35683,7 @@
                   <a:srgbClr val="1B3B6F"/>
                 </a:solidFill>
                 <a:latin typeface="Amiri" pitchFamily="2" charset="-78"/>
+                <a:ea typeface="Amiri" pitchFamily="2" charset="-78"/>
                 <a:cs typeface="Amiri" pitchFamily="2" charset="-78"/>
               </a:rPr>
               <a:t>قِرَاءَةُ الأَسْئِلَةِ مُسْبَقًا</a:t>
@@ -35621,6 +35773,7 @@
                   <a:srgbClr val="1B3B6F"/>
                 </a:solidFill>
                 <a:latin typeface="Amiri" pitchFamily="2" charset="-78"/>
+                <a:ea typeface="Amiri" pitchFamily="2" charset="-78"/>
                 <a:cs typeface="Amiri" pitchFamily="2" charset="-78"/>
               </a:rPr>
               <a:t>الاسْتِمَاعُ الأَوَّلُ لِلْفَهْمِ العَامِّ</a:t>
@@ -35710,6 +35863,7 @@
                   <a:srgbClr val="1B3B6F"/>
                 </a:solidFill>
                 <a:latin typeface="Amiri" pitchFamily="2" charset="-78"/>
+                <a:ea typeface="Amiri" pitchFamily="2" charset="-78"/>
                 <a:cs typeface="Amiri" pitchFamily="2" charset="-78"/>
               </a:rPr>
               <a:t>التَّحَقُّقُ فِي الاسْتِمَاعِ الثَّانِي</a:t>
@@ -35799,6 +35953,7 @@
                   <a:srgbClr val="1B3B6F"/>
                 </a:solidFill>
                 <a:latin typeface="Amiri" pitchFamily="2" charset="-78"/>
+                <a:ea typeface="Amiri" pitchFamily="2" charset="-78"/>
                 <a:cs typeface="Amiri" pitchFamily="2" charset="-78"/>
               </a:rPr>
               <a:t>مُشَتِّتَاتُ الاسْتِمَاعِ</a:t>
@@ -35845,11 +36000,12 @@
               <a:buNone/>
             </a:pPr>
             <a:r>
-              <a:rPr lang="en-US" sz="1000" i="1" dirty="0">
+              <a:rPr lang="ar-SA" sz="1000" i="1" dirty="0">
                 <a:solidFill>
                   <a:srgbClr val="5A6472"/>
                 </a:solidFill>
                 <a:latin typeface="Calibri" pitchFamily="34" charset="0"/>
+                <a:ea typeface="Amiri" pitchFamily="2" charset="-78"/>
                 <a:cs typeface="Amiri" pitchFamily="2" charset="-78"/>
               </a:rPr>
               <a:t>  sg. مُشَتِّتٌ</a:t>
@@ -35967,6 +36123,7 @@
                   <a:srgbClr val="1B3B6F"/>
                 </a:solidFill>
                 <a:latin typeface="Amiri" pitchFamily="2" charset="-78"/>
+                <a:ea typeface="Amiri" pitchFamily="2" charset="-78"/>
                 <a:cs typeface="Amiri" pitchFamily="2" charset="-78"/>
               </a:rPr>
               <a:t>قَبْلَ الاسْتِمَاعِ، أَقْرَأُ ______ وَأُحَدِّدُ ______ .</a:t>
@@ -36636,6 +36793,7 @@
                   <a:srgbClr val="FFFFFF"/>
                 </a:solidFill>
                 <a:latin typeface="Amiri" pitchFamily="2" charset="-78"/>
+                <a:ea typeface="Amiri" pitchFamily="2" charset="-78"/>
                 <a:cs typeface="Amiri" pitchFamily="2" charset="-78"/>
               </a:rPr>
               <a:t>أَحْسَنْتُمْ! إِلَى اللِّقَاءِ</a:t>
@@ -36788,6 +36946,7 @@
                   <a:srgbClr val="D4AF37"/>
                 </a:solidFill>
                 <a:latin typeface="Amiri" pitchFamily="2" charset="-78"/>
+                <a:ea typeface="Amiri" pitchFamily="2" charset="-78"/>
                 <a:cs typeface="Amiri" pitchFamily="2" charset="-78"/>
               </a:rPr>
               <a:t>الوَرَقَةُ الأُولَى — الاسْتِمَاعُ</a:t>
@@ -36921,6 +37080,7 @@
                   <a:srgbClr val="D4AF37"/>
                 </a:solidFill>
                 <a:latin typeface="Amiri" pitchFamily="2" charset="-78"/>
+                <a:ea typeface="Amiri" pitchFamily="2" charset="-78"/>
                 <a:cs typeface="Amiri" pitchFamily="2" charset="-78"/>
               </a:rPr>
               <a:t>م</a:t>
@@ -37241,6 +37401,7 @@
                   <a:srgbClr val="8A6D1E"/>
                 </a:solidFill>
                 <a:latin typeface="Amiri" pitchFamily="2" charset="-78"/>
+                <a:ea typeface="Amiri" pitchFamily="2" charset="-78"/>
                 <a:cs typeface="Amiri" pitchFamily="2" charset="-78"/>
               </a:rPr>
               <a:t>خَرِيطَةُ الدَّرْسِ</a:t>
@@ -37555,6 +37716,7 @@
                   <a:srgbClr val="0E7C86"/>
                 </a:solidFill>
                 <a:latin typeface="Amiri" pitchFamily="2" charset="-78"/>
+                <a:ea typeface="Amiri" pitchFamily="2" charset="-78"/>
                 <a:cs typeface="Amiri" pitchFamily="2" charset="-78"/>
               </a:rPr>
               <a:t>اِبْدَأِ الآنَ</a:t>
@@ -37831,6 +37993,7 @@
                   <a:srgbClr val="1B3B6F"/>
                 </a:solidFill>
                 <a:latin typeface="Amiri" pitchFamily="2" charset="-78"/>
+                <a:ea typeface="Amiri" pitchFamily="2" charset="-78"/>
                 <a:cs typeface="Amiri" pitchFamily="2" charset="-78"/>
               </a:rPr>
               <a:t>الامْتِحَانُ</a:t>
@@ -38107,6 +38270,7 @@
                   <a:srgbClr val="1E6B52"/>
                 </a:solidFill>
                 <a:latin typeface="Amiri" pitchFamily="2" charset="-78"/>
+                <a:ea typeface="Amiri" pitchFamily="2" charset="-78"/>
                 <a:cs typeface="Amiri" pitchFamily="2" charset="-78"/>
               </a:rPr>
               <a:t>الجَاهِزِيَّةُ</a:t>
@@ -38383,6 +38547,7 @@
                   <a:srgbClr val="6B4C9A"/>
                 </a:solidFill>
                 <a:latin typeface="Amiri" pitchFamily="2" charset="-78"/>
+                <a:ea typeface="Amiri" pitchFamily="2" charset="-78"/>
                 <a:cs typeface="Amiri" pitchFamily="2" charset="-78"/>
               </a:rPr>
               <a:t>شَاهِدْ</a:t>
@@ -38659,6 +38824,7 @@
                   <a:srgbClr val="1E6B52"/>
                 </a:solidFill>
                 <a:latin typeface="Amiri" pitchFamily="2" charset="-78"/>
+                <a:ea typeface="Amiri" pitchFamily="2" charset="-78"/>
                 <a:cs typeface="Amiri" pitchFamily="2" charset="-78"/>
               </a:rPr>
               <a:t>أَهْدَافِي</a:t>
@@ -38935,6 +39101,7 @@
                   <a:srgbClr val="8A6D1E"/>
                 </a:solidFill>
                 <a:latin typeface="Amiri" pitchFamily="2" charset="-78"/>
+                <a:ea typeface="Amiri" pitchFamily="2" charset="-78"/>
                 <a:cs typeface="Amiri" pitchFamily="2" charset="-78"/>
               </a:rPr>
               <a:t>رِحْلَتِي</a:t>
@@ -39211,6 +39378,7 @@
                   <a:srgbClr val="C45A3C"/>
                 </a:solidFill>
                 <a:latin typeface="Amiri" pitchFamily="2" charset="-78"/>
+                <a:ea typeface="Amiri" pitchFamily="2" charset="-78"/>
                 <a:cs typeface="Amiri" pitchFamily="2" charset="-78"/>
               </a:rPr>
               <a:t>اِسْتَعِدَّ</a:t>
@@ -39454,6 +39622,7 @@
                   <a:srgbClr val="D4AF37"/>
                 </a:solidFill>
                 <a:latin typeface="Amiri" pitchFamily="2" charset="-78"/>
+                <a:ea typeface="Amiri" pitchFamily="2" charset="-78"/>
                 <a:cs typeface="Amiri" pitchFamily="2" charset="-78"/>
               </a:rPr>
               <a:t>م</a:t>
@@ -39774,6 +39943,7 @@
                   <a:srgbClr val="8A6D1E"/>
                 </a:solidFill>
                 <a:latin typeface="Amiri" pitchFamily="2" charset="-78"/>
+                <a:ea typeface="Amiri" pitchFamily="2" charset="-78"/>
                 <a:cs typeface="Amiri" pitchFamily="2" charset="-78"/>
               </a:rPr>
               <a:t>اِبْدَأِ الآنَ</a:t>
@@ -39960,6 +40130,7 @@
                   <a:srgbClr val="1B3B6F"/>
                 </a:solidFill>
                 <a:latin typeface="Amiri" pitchFamily="2" charset="-78"/>
+                <a:ea typeface="Amiri" pitchFamily="2" charset="-78"/>
                 <a:cs typeface="Amiri" pitchFamily="2" charset="-78"/>
               </a:rPr>
               <a:t>وَرَقَةُ الامْتِحَانِ</a:t>
@@ -40424,6 +40595,7 @@
                   <a:srgbClr val="1B3B6F"/>
                 </a:solidFill>
                 <a:latin typeface="Amiri" pitchFamily="2" charset="-78"/>
+                <a:ea typeface="Amiri" pitchFamily="2" charset="-78"/>
                 <a:cs typeface="Amiri" pitchFamily="2" charset="-78"/>
               </a:rPr>
               <a:t>مَعَايِيرُ التَّقْيِيمِ</a:t>
@@ -40888,6 +41060,7 @@
                   <a:srgbClr val="1B3B6F"/>
                 </a:solidFill>
                 <a:latin typeface="Amiri" pitchFamily="2" charset="-78"/>
+                <a:ea typeface="Amiri" pitchFamily="2" charset="-78"/>
                 <a:cs typeface="Amiri" pitchFamily="2" charset="-78"/>
               </a:rPr>
               <a:t>جَاهِزِيَّةُ الامْتِحَانِ</a:t>
@@ -41352,6 +41525,7 @@
                   <a:srgbClr val="1B3B6F"/>
                 </a:solidFill>
                 <a:latin typeface="Amiri" pitchFamily="2" charset="-78"/>
+                <a:ea typeface="Amiri" pitchFamily="2" charset="-78"/>
                 <a:cs typeface="Amiri" pitchFamily="2" charset="-78"/>
               </a:rPr>
               <a:t>صَحِيحٌ أَنَّ الامْتِحَانَ</a:t>
@@ -41378,6 +41552,7 @@
                   <a:srgbClr val="1B3B6F"/>
                 </a:solidFill>
                 <a:latin typeface="Amiri" pitchFamily="2" charset="-78"/>
+                <a:ea typeface="Amiri" pitchFamily="2" charset="-78"/>
                 <a:cs typeface="Amiri" pitchFamily="2" charset="-78"/>
               </a:rPr>
               <a:t>، غَيْرَ أَنَّنَا مُسْتَعِدُّونَ</a:t>
@@ -41492,6 +41667,7 @@
                   <a:srgbClr val="1F2A37"/>
                 </a:solidFill>
                 <a:latin typeface="Amiri" pitchFamily="2" charset="-78"/>
+                <a:ea typeface="Amiri" pitchFamily="2" charset="-78"/>
                 <a:cs typeface="Amiri" pitchFamily="2" charset="-78"/>
               </a:rPr>
               <a:t>صَعْبًا</a:t>
@@ -41593,6 +41769,7 @@
                   <a:srgbClr val="1F2A37"/>
                 </a:solidFill>
                 <a:latin typeface="Amiri" pitchFamily="2" charset="-78"/>
+                <a:ea typeface="Amiri" pitchFamily="2" charset="-78"/>
                 <a:cs typeface="Amiri" pitchFamily="2" charset="-78"/>
               </a:rPr>
               <a:t>صَعْبٍ</a:t>
@@ -41694,6 +41871,7 @@
                   <a:srgbClr val="1F2A37"/>
                 </a:solidFill>
                 <a:latin typeface="Amiri" pitchFamily="2" charset="-78"/>
+                <a:ea typeface="Amiri" pitchFamily="2" charset="-78"/>
                 <a:cs typeface="Amiri" pitchFamily="2" charset="-78"/>
               </a:rPr>
               <a:t>صَعْبٌ</a:t>
@@ -41842,6 +42020,7 @@
                   <a:srgbClr val="1B3B6F"/>
                 </a:solidFill>
                 <a:latin typeface="Amiri" pitchFamily="2" charset="-78"/>
+                <a:ea typeface="Amiri" pitchFamily="2" charset="-78"/>
                 <a:cs typeface="Amiri" pitchFamily="2" charset="-78"/>
               </a:rPr>
               <a:t>هَدَفِي أَنْ</a:t>
@@ -41868,6 +42047,7 @@
                   <a:srgbClr val="1B3B6F"/>
                 </a:solidFill>
                 <a:latin typeface="Amiri" pitchFamily="2" charset="-78"/>
+                <a:ea typeface="Amiri" pitchFamily="2" charset="-78"/>
                 <a:cs typeface="Amiri" pitchFamily="2" charset="-78"/>
               </a:rPr>
               <a:t>دَرَجَتِي فِي الاسْتِمَاعِ</a:t>
@@ -41982,6 +42162,7 @@
                   <a:srgbClr val="1F2A37"/>
                 </a:solidFill>
                 <a:latin typeface="Amiri" pitchFamily="2" charset="-78"/>
+                <a:ea typeface="Amiri" pitchFamily="2" charset="-78"/>
                 <a:cs typeface="Amiri" pitchFamily="2" charset="-78"/>
               </a:rPr>
               <a:t>أُحَسِّنَ</a:t>
@@ -42083,6 +42264,7 @@
                   <a:srgbClr val="1F2A37"/>
                 </a:solidFill>
                 <a:latin typeface="Amiri" pitchFamily="2" charset="-78"/>
+                <a:ea typeface="Amiri" pitchFamily="2" charset="-78"/>
                 <a:cs typeface="Amiri" pitchFamily="2" charset="-78"/>
               </a:rPr>
               <a:t>أُحَسِّنُ</a:t>
@@ -42184,6 +42366,7 @@
                   <a:srgbClr val="1F2A37"/>
                 </a:solidFill>
                 <a:latin typeface="Amiri" pitchFamily="2" charset="-78"/>
+                <a:ea typeface="Amiri" pitchFamily="2" charset="-78"/>
                 <a:cs typeface="Amiri" pitchFamily="2" charset="-78"/>
               </a:rPr>
               <a:t>حَسَّنْتُ</a:t>
@@ -42519,6 +42702,7 @@
                   <a:srgbClr val="D4AF37"/>
                 </a:solidFill>
                 <a:latin typeface="Amiri" pitchFamily="2" charset="-78"/>
+                <a:ea typeface="Amiri" pitchFamily="2" charset="-78"/>
                 <a:cs typeface="Amiri" pitchFamily="2" charset="-78"/>
               </a:rPr>
               <a:t>م</a:t>
@@ -42839,6 +43023,7 @@
                   <a:srgbClr val="8A6D1E"/>
                 </a:solidFill>
                 <a:latin typeface="Amiri" pitchFamily="2" charset="-78"/>
+                <a:ea typeface="Amiri" pitchFamily="2" charset="-78"/>
                 <a:cs typeface="Amiri" pitchFamily="2" charset="-78"/>
               </a:rPr>
               <a:t>الإِجَابَاتُ وَالتَّعْلِيلُ</a:t>
@@ -43025,6 +43210,7 @@
                   <a:srgbClr val="1B3B6F"/>
                 </a:solidFill>
                 <a:latin typeface="Amiri" pitchFamily="2" charset="-78"/>
+                <a:ea typeface="Amiri" pitchFamily="2" charset="-78"/>
                 <a:cs typeface="Amiri" pitchFamily="2" charset="-78"/>
               </a:rPr>
               <a:t>وَرَقَةُ الامْتِحَانِ</a:t>
@@ -43554,6 +43740,7 @@
                   <a:srgbClr val="1B3B6F"/>
                 </a:solidFill>
                 <a:latin typeface="Amiri" pitchFamily="2" charset="-78"/>
+                <a:ea typeface="Amiri" pitchFamily="2" charset="-78"/>
                 <a:cs typeface="Amiri" pitchFamily="2" charset="-78"/>
               </a:rPr>
               <a:t>مَعَايِيرُ التَّقْيِيمِ</a:t>
@@ -44083,6 +44270,7 @@
                   <a:srgbClr val="1B3B6F"/>
                 </a:solidFill>
                 <a:latin typeface="Amiri" pitchFamily="2" charset="-78"/>
+                <a:ea typeface="Amiri" pitchFamily="2" charset="-78"/>
                 <a:cs typeface="Amiri" pitchFamily="2" charset="-78"/>
               </a:rPr>
               <a:t>جَاهِزِيَّةُ الامْتِحَانِ</a:t>
@@ -44612,6 +44800,7 @@
                   <a:srgbClr val="1B3B6F"/>
                 </a:solidFill>
                 <a:latin typeface="Amiri" pitchFamily="2" charset="-78"/>
+                <a:ea typeface="Amiri" pitchFamily="2" charset="-78"/>
                 <a:cs typeface="Amiri" pitchFamily="2" charset="-78"/>
               </a:rPr>
               <a:t>صَحِيحٌ أَنَّ الامْتِحَانَ</a:t>
@@ -44638,6 +44827,7 @@
                   <a:srgbClr val="1B3B6F"/>
                 </a:solidFill>
                 <a:latin typeface="Amiri" pitchFamily="2" charset="-78"/>
+                <a:ea typeface="Amiri" pitchFamily="2" charset="-78"/>
                 <a:cs typeface="Amiri" pitchFamily="2" charset="-78"/>
               </a:rPr>
               <a:t>، غَيْرَ أَنَّنَا مُسْتَعِدُّونَ</a:t>
@@ -44752,6 +44942,7 @@
                   <a:srgbClr val="9AA1AB"/>
                 </a:solidFill>
                 <a:latin typeface="Amiri" pitchFamily="2" charset="-78"/>
+                <a:ea typeface="Amiri" pitchFamily="2" charset="-78"/>
                 <a:cs typeface="Amiri" pitchFamily="2" charset="-78"/>
               </a:rPr>
               <a:t>صَعْبًا</a:t>
@@ -44853,6 +45044,7 @@
                   <a:srgbClr val="9AA1AB"/>
                 </a:solidFill>
                 <a:latin typeface="Amiri" pitchFamily="2" charset="-78"/>
+                <a:ea typeface="Amiri" pitchFamily="2" charset="-78"/>
                 <a:cs typeface="Amiri" pitchFamily="2" charset="-78"/>
               </a:rPr>
               <a:t>صَعْبٍ</a:t>
@@ -44981,6 +45173,7 @@
                   <a:srgbClr val="1F2A37"/>
                 </a:solidFill>
                 <a:latin typeface="Amiri" pitchFamily="2" charset="-78"/>
+                <a:ea typeface="Amiri" pitchFamily="2" charset="-78"/>
                 <a:cs typeface="Amiri" pitchFamily="2" charset="-78"/>
               </a:rPr>
               <a:t>صَعْبٌ</a:t>
@@ -45167,6 +45360,7 @@
                   <a:srgbClr val="1B3B6F"/>
                 </a:solidFill>
                 <a:latin typeface="Amiri" pitchFamily="2" charset="-78"/>
+                <a:ea typeface="Amiri" pitchFamily="2" charset="-78"/>
                 <a:cs typeface="Amiri" pitchFamily="2" charset="-78"/>
               </a:rPr>
               <a:t>هَدَفِي أَنْ</a:t>
@@ -45193,6 +45387,7 @@
                   <a:srgbClr val="1B3B6F"/>
                 </a:solidFill>
                 <a:latin typeface="Amiri" pitchFamily="2" charset="-78"/>
+                <a:ea typeface="Amiri" pitchFamily="2" charset="-78"/>
                 <a:cs typeface="Amiri" pitchFamily="2" charset="-78"/>
               </a:rPr>
               <a:t>دَرَجَتِي فِي الاسْتِمَاعِ</a:t>
@@ -45334,6 +45529,7 @@
                   <a:srgbClr val="1F2A37"/>
                 </a:solidFill>
                 <a:latin typeface="Amiri" pitchFamily="2" charset="-78"/>
+                <a:ea typeface="Amiri" pitchFamily="2" charset="-78"/>
                 <a:cs typeface="Amiri" pitchFamily="2" charset="-78"/>
               </a:rPr>
               <a:t>أُحَسِّنَ</a:t>
@@ -45435,6 +45631,7 @@
                   <a:srgbClr val="9AA1AB"/>
                 </a:solidFill>
                 <a:latin typeface="Amiri" pitchFamily="2" charset="-78"/>
+                <a:ea typeface="Amiri" pitchFamily="2" charset="-78"/>
                 <a:cs typeface="Amiri" pitchFamily="2" charset="-78"/>
               </a:rPr>
               <a:t>أُحَسِّنُ</a:t>
@@ -45536,6 +45733,7 @@
                   <a:srgbClr val="9AA1AB"/>
                 </a:solidFill>
                 <a:latin typeface="Amiri" pitchFamily="2" charset="-78"/>
+                <a:ea typeface="Amiri" pitchFamily="2" charset="-78"/>
                 <a:cs typeface="Amiri" pitchFamily="2" charset="-78"/>
               </a:rPr>
               <a:t>حَسَّنْتُ</a:t>
@@ -45725,6 +45923,7 @@
                   <a:srgbClr val="1B3B6F"/>
                 </a:solidFill>
                 <a:latin typeface="Amiri" pitchFamily="2" charset="-78"/>
+                <a:ea typeface="Amiri" pitchFamily="2" charset="-78"/>
                 <a:cs typeface="Amiri" pitchFamily="2" charset="-78"/>
               </a:rPr>
               <a:t>هَدَفِي </a:t>
@@ -45741,6 +45940,7 @@
                   <a:srgbClr val="D6336C"/>
                 </a:solidFill>
                 <a:latin typeface="Amiri" pitchFamily="2" charset="-78"/>
+                <a:ea typeface="Amiri" pitchFamily="2" charset="-78"/>
                 <a:cs typeface="Amiri" pitchFamily="2" charset="-78"/>
               </a:rPr>
               <a:t>أَنْ أُحَسِّنَ</a:t>
@@ -45757,6 +45957,7 @@
                   <a:srgbClr val="1B3B6F"/>
                 </a:solidFill>
                 <a:latin typeface="Amiri" pitchFamily="2" charset="-78"/>
+                <a:ea typeface="Amiri" pitchFamily="2" charset="-78"/>
                 <a:cs typeface="Amiri" pitchFamily="2" charset="-78"/>
               </a:rPr>
               <a:t> … · صَحِيحٌ أَنَّ … غَيْرَ أَنَّ …</a:t>
@@ -45890,6 +46091,7 @@
                   <a:srgbClr val="D4AF37"/>
                 </a:solidFill>
                 <a:latin typeface="Amiri" pitchFamily="2" charset="-78"/>
+                <a:ea typeface="Amiri" pitchFamily="2" charset="-78"/>
                 <a:cs typeface="Amiri" pitchFamily="2" charset="-78"/>
               </a:rPr>
               <a:t>م</a:t>
@@ -46210,6 +46412,7 @@
                   <a:srgbClr val="8A6D1E"/>
                 </a:solidFill>
                 <a:latin typeface="Amiri" pitchFamily="2" charset="-78"/>
+                <a:ea typeface="Amiri" pitchFamily="2" charset="-78"/>
                 <a:cs typeface="Amiri" pitchFamily="2" charset="-78"/>
               </a:rPr>
               <a:t>الأَهْدَافُ وَمَعَايِيرُ النَّجَاحِ</a:t>
@@ -46358,6 +46561,7 @@
                   <a:srgbClr val="8A6D1E"/>
                 </a:solidFill>
                 <a:latin typeface="Amiri" pitchFamily="2" charset="-78"/>
+                <a:ea typeface="Amiri" pitchFamily="2" charset="-78"/>
                 <a:cs typeface="Amiri" pitchFamily="2" charset="-78"/>
               </a:rPr>
               <a:t>سَتَتَعَلَّمُ اليَوْمَ</a:t>
@@ -47616,6 +47820,7 @@
                   <a:srgbClr val="D4AF37"/>
                 </a:solidFill>
                 <a:latin typeface="Amiri" pitchFamily="2" charset="-78"/>
+                <a:ea typeface="Amiri" pitchFamily="2" charset="-78"/>
                 <a:cs typeface="Amiri" pitchFamily="2" charset="-78"/>
               </a:rPr>
               <a:t>كَلِمَاتُ الدَّرْسِ</a:t>
@@ -47919,6 +48124,7 @@
                   <a:srgbClr val="1B3B6F"/>
                 </a:solidFill>
                 <a:latin typeface="Amiri" pitchFamily="2" charset="-78"/>
+                <a:ea typeface="Amiri" pitchFamily="2" charset="-78"/>
                 <a:cs typeface="Amiri" pitchFamily="2" charset="-78"/>
               </a:rPr>
               <a:t>امْتِحَانٌ</a:t>
@@ -47952,11 +48158,12 @@
               <a:buNone/>
             </a:pPr>
             <a:r>
-              <a:rPr lang="ur-PK" altLang="en-US" sz="1400" b="1" dirty="0">
+              <a:rPr lang="ar-SA" altLang="en-US" sz="1400" b="1" dirty="0">
                 <a:solidFill>
                   <a:srgbClr val="2E8B57"/>
                 </a:solidFill>
                 <a:latin typeface="Amiri" pitchFamily="2" charset="-78"/>
+                <a:ea typeface="Amiri" pitchFamily="2" charset="-78"/>
                 <a:cs typeface="Amiri" pitchFamily="2" charset="-78"/>
               </a:rPr>
               <a:t>‎امتحان‎ </a:t>
@@ -48008,6 +48215,7 @@
                   <a:srgbClr val="1B3B6F"/>
                 </a:solidFill>
                 <a:latin typeface="Amiri" pitchFamily="2" charset="-78"/>
+                <a:ea typeface="Amiri" pitchFamily="2" charset="-78"/>
                 <a:cs typeface="Amiri" pitchFamily="2" charset="-78"/>
               </a:rPr>
               <a:t>وَرَقَةٌ</a:t>
@@ -48041,11 +48249,12 @@
               <a:buNone/>
             </a:pPr>
             <a:r>
-              <a:rPr lang="ur-PK" altLang="en-US" sz="1400" b="1" dirty="0">
+              <a:rPr lang="ar-SA" altLang="en-US" sz="1400" b="1" dirty="0">
                 <a:solidFill>
                   <a:srgbClr val="2E8B57"/>
                 </a:solidFill>
                 <a:latin typeface="Amiri" pitchFamily="2" charset="-78"/>
+                <a:ea typeface="Amiri" pitchFamily="2" charset="-78"/>
                 <a:cs typeface="Amiri" pitchFamily="2" charset="-78"/>
               </a:rPr>
               <a:t>‎ورق‎ </a:t>
@@ -48097,6 +48306,7 @@
                   <a:srgbClr val="1B3B6F"/>
                 </a:solidFill>
                 <a:latin typeface="Amiri" pitchFamily="2" charset="-78"/>
+                <a:ea typeface="Amiri" pitchFamily="2" charset="-78"/>
                 <a:cs typeface="Amiri" pitchFamily="2" charset="-78"/>
               </a:rPr>
               <a:t>مِعْيَارٌ</a:t>
@@ -48130,11 +48340,12 @@
               <a:buNone/>
             </a:pPr>
             <a:r>
-              <a:rPr lang="ur-PK" altLang="en-US" sz="1400" b="1" dirty="0">
+              <a:rPr lang="ar-SA" altLang="en-US" sz="1400" b="1" dirty="0">
                 <a:solidFill>
                   <a:srgbClr val="2E8B57"/>
                 </a:solidFill>
                 <a:latin typeface="Amiri" pitchFamily="2" charset="-78"/>
+                <a:ea typeface="Amiri" pitchFamily="2" charset="-78"/>
                 <a:cs typeface="Amiri" pitchFamily="2" charset="-78"/>
               </a:rPr>
               <a:t>‎معیار‎ </a:t>
@@ -48186,6 +48397,7 @@
                   <a:srgbClr val="1B3B6F"/>
                 </a:solidFill>
                 <a:latin typeface="Amiri" pitchFamily="2" charset="-78"/>
+                <a:ea typeface="Amiri" pitchFamily="2" charset="-78"/>
                 <a:cs typeface="Amiri" pitchFamily="2" charset="-78"/>
               </a:rPr>
               <a:t>هَدَفٌ</a:t>
@@ -48219,11 +48431,12 @@
               <a:buNone/>
             </a:pPr>
             <a:r>
-              <a:rPr lang="ur-PK" altLang="en-US" sz="1400" b="1" dirty="0">
+              <a:rPr lang="ar-SA" altLang="en-US" sz="1400" b="1" dirty="0">
                 <a:solidFill>
                   <a:srgbClr val="2E8B57"/>
                 </a:solidFill>
                 <a:latin typeface="Amiri" pitchFamily="2" charset="-78"/>
+                <a:ea typeface="Amiri" pitchFamily="2" charset="-78"/>
                 <a:cs typeface="Amiri" pitchFamily="2" charset="-78"/>
               </a:rPr>
               <a:t>‎ہدف‎ </a:t>
@@ -48275,6 +48488,7 @@
                   <a:srgbClr val="1B3B6F"/>
                 </a:solidFill>
                 <a:latin typeface="Amiri" pitchFamily="2" charset="-78"/>
+                <a:ea typeface="Amiri" pitchFamily="2" charset="-78"/>
                 <a:cs typeface="Amiri" pitchFamily="2" charset="-78"/>
               </a:rPr>
               <a:t>تَحْقِيقٌ</a:t>
@@ -48308,11 +48522,12 @@
               <a:buNone/>
             </a:pPr>
             <a:r>
-              <a:rPr lang="ur-PK" altLang="en-US" sz="1400" b="1" dirty="0">
+              <a:rPr lang="ar-SA" altLang="en-US" sz="1400" b="1" dirty="0">
                 <a:solidFill>
                   <a:srgbClr val="2E8B57"/>
                 </a:solidFill>
                 <a:latin typeface="Amiri" pitchFamily="2" charset="-78"/>
+                <a:ea typeface="Amiri" pitchFamily="2" charset="-78"/>
                 <a:cs typeface="Amiri" pitchFamily="2" charset="-78"/>
               </a:rPr>
               <a:t>‎تحقیق‎ </a:t>
@@ -48459,6 +48674,7 @@
                   <a:srgbClr val="D4AF37"/>
                 </a:solidFill>
                 <a:latin typeface="Amiri" pitchFamily="2" charset="-78"/>
+                <a:ea typeface="Amiri" pitchFamily="2" charset="-78"/>
                 <a:cs typeface="Amiri" pitchFamily="2" charset="-78"/>
               </a:rPr>
               <a:t>م</a:t>
@@ -48779,6 +48995,7 @@
                   <a:srgbClr val="8A6D1E"/>
                 </a:solidFill>
                 <a:latin typeface="Amiri" pitchFamily="2" charset="-78"/>
+                <a:ea typeface="Amiri" pitchFamily="2" charset="-78"/>
                 <a:cs typeface="Amiri" pitchFamily="2" charset="-78"/>
               </a:rPr>
               <a:t>كَلِمَاتُ الدَّرْسِ</a:t>
@@ -49082,6 +49299,7 @@
                   <a:srgbClr val="1B3B6F"/>
                 </a:solidFill>
                 <a:latin typeface="Amiri" pitchFamily="2" charset="-78"/>
+                <a:ea typeface="Amiri" pitchFamily="2" charset="-78"/>
                 <a:cs typeface="Amiri" pitchFamily="2" charset="-78"/>
               </a:rPr>
               <a:t>وَرَقَةُ الامْتِحَانِ</a:t>
@@ -49239,6 +49457,7 @@
                   <a:srgbClr val="1B3B6F"/>
                 </a:solidFill>
                 <a:latin typeface="Amiri" pitchFamily="2" charset="-78"/>
+                <a:ea typeface="Amiri" pitchFamily="2" charset="-78"/>
                 <a:cs typeface="Amiri" pitchFamily="2" charset="-78"/>
               </a:rPr>
               <a:t>أَوْرَاقُ الامْتِحَانِ</a:t>
@@ -49374,6 +49593,7 @@
                   <a:srgbClr val="1B3B6F"/>
                 </a:solidFill>
                 <a:latin typeface="Amiri" pitchFamily="2" charset="-78"/>
+                <a:ea typeface="Amiri" pitchFamily="2" charset="-78"/>
                 <a:cs typeface="Amiri" pitchFamily="2" charset="-78"/>
               </a:rPr>
               <a:t>الوَرَقَةُ الأُولَى — الاسْتِمَاعُ</a:t>
@@ -49563,6 +49783,7 @@
                   <a:srgbClr val="1B3B6F"/>
                 </a:solidFill>
                 <a:latin typeface="Amiri" pitchFamily="2" charset="-78"/>
+                <a:ea typeface="Amiri" pitchFamily="2" charset="-78"/>
                 <a:cs typeface="Amiri" pitchFamily="2" charset="-78"/>
               </a:rPr>
               <a:t>الوَرَقَةُ الثَّانِيَةُ — القِرَاءَةُ</a:t>
@@ -49752,6 +49973,7 @@
                   <a:srgbClr val="1B3B6F"/>
                 </a:solidFill>
                 <a:latin typeface="Amiri" pitchFamily="2" charset="-78"/>
+                <a:ea typeface="Amiri" pitchFamily="2" charset="-78"/>
                 <a:cs typeface="Amiri" pitchFamily="2" charset="-78"/>
               </a:rPr>
               <a:t>الوَرَقَةُ الثَّالِثَةُ — التَّحَدُّثُ</a:t>
@@ -49939,6 +50161,7 @@
                   <a:srgbClr val="D4AF37"/>
                 </a:solidFill>
                 <a:latin typeface="Amiri" pitchFamily="2" charset="-78"/>
+                <a:ea typeface="Amiri" pitchFamily="2" charset="-78"/>
                 <a:cs typeface="Amiri" pitchFamily="2" charset="-78"/>
               </a:rPr>
               <a:t>م</a:t>
@@ -50259,6 +50482,7 @@
                   <a:srgbClr val="8A6D1E"/>
                 </a:solidFill>
                 <a:latin typeface="Amiri" pitchFamily="2" charset="-78"/>
+                <a:ea typeface="Amiri" pitchFamily="2" charset="-78"/>
                 <a:cs typeface="Amiri" pitchFamily="2" charset="-78"/>
               </a:rPr>
               <a:t>كَلِمَاتُ الدَّرْسِ</a:t>
@@ -50432,6 +50656,7 @@
                   <a:srgbClr val="1B3B6F"/>
                 </a:solidFill>
                 <a:latin typeface="Amiri" pitchFamily="2" charset="-78"/>
+                <a:ea typeface="Amiri" pitchFamily="2" charset="-78"/>
                 <a:cs typeface="Amiri" pitchFamily="2" charset="-78"/>
               </a:rPr>
               <a:t>الوَرَقَةُ الرَّابِعَةُ — الكِتَابَةُ</a:t>
@@ -50751,6 +50976,7 @@
                   <a:srgbClr val="1B3B6F"/>
                 </a:solidFill>
                 <a:latin typeface="Amiri" pitchFamily="2" charset="-78"/>
+                <a:ea typeface="Amiri" pitchFamily="2" charset="-78"/>
                 <a:cs typeface="Amiri" pitchFamily="2" charset="-78"/>
               </a:rPr>
               <a:t>مَعَايِيرُ التَّقْيِيمِ</a:t>
@@ -50908,6 +51134,7 @@
                   <a:srgbClr val="1B3B6F"/>
                 </a:solidFill>
                 <a:latin typeface="Amiri" pitchFamily="2" charset="-78"/>
+                <a:ea typeface="Amiri" pitchFamily="2" charset="-78"/>
                 <a:cs typeface="Amiri" pitchFamily="2" charset="-78"/>
               </a:rPr>
               <a:t>مِعْيَارُ التَّقْيِيمِ</a:t>
@@ -51108,6 +51335,7 @@
                   <a:srgbClr val="1B3B6F"/>
                 </a:solidFill>
                 <a:latin typeface="Amiri" pitchFamily="2" charset="-78"/>
+                <a:ea typeface="Amiri" pitchFamily="2" charset="-78"/>
                 <a:cs typeface="Amiri" pitchFamily="2" charset="-78"/>
               </a:rPr>
               <a:t>مَحَاوِرُ المَوْضُوعَاتِ</a:t>
@@ -51265,6 +51493,7 @@
                   <a:srgbClr val="1B3B6F"/>
                 </a:solidFill>
                 <a:latin typeface="Amiri" pitchFamily="2" charset="-78"/>
+                <a:ea typeface="Amiri" pitchFamily="2" charset="-78"/>
                 <a:cs typeface="Amiri" pitchFamily="2" charset="-78"/>
               </a:rPr>
               <a:t>مِحْوَرٌ</a:t>
@@ -51465,6 +51694,7 @@
                   <a:srgbClr val="1B3B6F"/>
                 </a:solidFill>
                 <a:latin typeface="Amiri" pitchFamily="2" charset="-78"/>
+                <a:ea typeface="Amiri" pitchFamily="2" charset="-78"/>
                 <a:cs typeface="Amiri" pitchFamily="2" charset="-78"/>
               </a:rPr>
               <a:t>جَاهِزِيَّةُ الامْتِحَانِ</a:t>
@@ -51617,13 +51847,9 @@
     <a:fontScheme name="Office">
       <a:majorFont>
         <a:latin typeface="Calibri Light" panose="020F0302020204030204"/>
-        <a:ea typeface=""/>
-        <a:cs typeface=""/>
-        <a:font script="Jpan" typeface="游ゴシック Light"/>
-        <a:font script="Hang" typeface="맑은 고딕"/>
-        <a:font script="Hans" typeface="等线 Light"/>
-        <a:font script="Hant" typeface="新細明體"/>
-        <a:font script="Arab" typeface="Times New Roman"/>
+        <a:ea typeface="Amiri" pitchFamily="2" charset="-78"/>
+        <a:cs typeface="Amiri" pitchFamily="2" charset="-78"/>
+        <a:font script="Arab" typeface="Amiri"/>
         <a:font script="Hebr" typeface="Times New Roman"/>
         <a:font script="Thai" typeface="Angsana New"/>
         <a:font script="Ethi" typeface="Nyala"/>
@@ -51669,13 +51895,9 @@
       </a:majorFont>
       <a:minorFont>
         <a:latin typeface="Calibri" panose="020F0502020204030204"/>
-        <a:ea typeface=""/>
-        <a:cs typeface=""/>
-        <a:font script="Jpan" typeface="游ゴシック"/>
-        <a:font script="Hang" typeface="맑은 고딕"/>
-        <a:font script="Hans" typeface="等线"/>
-        <a:font script="Hant" typeface="新細明體"/>
-        <a:font script="Arab" typeface="Arial"/>
+        <a:ea typeface="Amiri" pitchFamily="2" charset="-78"/>
+        <a:cs typeface="Amiri" pitchFamily="2" charset="-78"/>
+        <a:font script="Arab" typeface="Amiri"/>
         <a:font script="Hebr" typeface="Arial"/>
         <a:font script="Thai" typeface="Cordia New"/>
         <a:font script="Ethi" typeface="Nyala"/>
